--- a/reports/Cascade_Kenya_2026.pptx
+++ b/reports/Cascade_Kenya_2026.pptx
@@ -5375,7 +5375,40 @@
                 <a:ea typeface="Calibri" pitchFamily="34" charset="-122"/>
                 <a:cs typeface="Calibri" pitchFamily="34" charset="-120"/>
               </a:rPr>
-              <a:t>GitHub: compound-crisis-cascade-kenya</a:t>
+              <a:t>GitHub: </a:t>
+            </a:r>
+            <a:r>
+              <a:rPr lang="en-US" sz="1050" dirty="0" err="1">
+                <a:solidFill>
+                  <a:srgbClr val="6B8A9E"/>
+                </a:solidFill>
+                <a:latin typeface="Calibri" pitchFamily="34" charset="0"/>
+                <a:ea typeface="Calibri" pitchFamily="34" charset="-122"/>
+                <a:cs typeface="Calibri" pitchFamily="34" charset="-120"/>
+              </a:rPr>
+              <a:t>MutwiriC</a:t>
+            </a:r>
+            <a:r>
+              <a:rPr lang="en-US" sz="1050" dirty="0">
+                <a:solidFill>
+                  <a:srgbClr val="6B8A9E"/>
+                </a:solidFill>
+                <a:latin typeface="Calibri" pitchFamily="34" charset="0"/>
+                <a:ea typeface="Calibri" pitchFamily="34" charset="-122"/>
+                <a:cs typeface="Calibri" pitchFamily="34" charset="-120"/>
+              </a:rPr>
+              <a:t>/compound-crisis-cascade-</a:t>
+            </a:r>
+            <a:r>
+              <a:rPr lang="en-US" sz="1050" dirty="0" err="1">
+                <a:solidFill>
+                  <a:srgbClr val="6B8A9E"/>
+                </a:solidFill>
+                <a:latin typeface="Calibri" pitchFamily="34" charset="0"/>
+                <a:ea typeface="Calibri" pitchFamily="34" charset="-122"/>
+                <a:cs typeface="Calibri" pitchFamily="34" charset="-120"/>
+              </a:rPr>
+              <a:t>kenya</a:t>
             </a:r>
             <a:endParaRPr lang="en-US" sz="1050" dirty="0"/>
           </a:p>

--- a/reports/Cascade_Kenya_2026.pptx
+++ b/reports/Cascade_Kenya_2026.pptx
@@ -15635,6 +15635,13 @@
             <a:prstDash val="solid"/>
           </a:ln>
         </p:spPr>
+        <p:txBody>
+          <a:bodyPr/>
+          <a:lstStyle/>
+          <a:p>
+            <a:endParaRPr lang="en-KE"/>
+          </a:p>
+        </p:txBody>
       </p:sp>
       <p:sp>
         <p:nvSpPr>
@@ -16147,8 +16154,8 @@
         </p:nvSpPr>
         <p:spPr>
           <a:xfrm>
-            <a:off x="4892040" y="4224528"/>
-            <a:ext cx="3657600" cy="384048"/>
+            <a:off x="4892040" y="3973068"/>
+            <a:ext cx="4069080" cy="635508"/>
           </a:xfrm>
           <a:prstGeom prst="rect">
             <a:avLst/>
@@ -16177,6 +16184,14 @@
               </a:rPr>
               <a:t>Bootstrap rank uncertainty: 1,000 iterations, 95% CI</a:t>
             </a:r>
+          </a:p>
+          <a:p>
+            <a:pPr marL="0" indent="0" algn="l">
+              <a:lnSpc>
+                <a:spcPct val="135000"/>
+              </a:lnSpc>
+              <a:buNone/>
+            </a:pPr>
             <a:endParaRPr lang="en-US" sz="850" dirty="0"/>
           </a:p>
           <a:p>
@@ -16195,7 +16210,26 @@
                 <a:ea typeface="Calibri" pitchFamily="34" charset="-122"/>
                 <a:cs typeface="Calibri" pitchFamily="34" charset="-120"/>
               </a:rPr>
-              <a:t>Validated against IPC Phase 3+ prevalence 2019-2025</a:t>
+              <a:t>VRI predicts IPC Phase 3+ outcomes: Pearson r = 0.379 (p = 0.047), </a:t>
+            </a:r>
+          </a:p>
+          <a:p>
+            <a:pPr marL="0" indent="0" algn="l">
+              <a:lnSpc>
+                <a:spcPct val="135000"/>
+              </a:lnSpc>
+              <a:buNone/>
+            </a:pPr>
+            <a:r>
+              <a:rPr lang="en-US" sz="850" dirty="0">
+                <a:solidFill>
+                  <a:srgbClr val="E8EDF2"/>
+                </a:solidFill>
+                <a:latin typeface="Calibri" pitchFamily="34" charset="0"/>
+                <a:ea typeface="Calibri" pitchFamily="34" charset="-122"/>
+                <a:cs typeface="Calibri" pitchFamily="34" charset="-120"/>
+              </a:rPr>
+              <a:t>Spearman rho = 0.388 (p = 0.042), n = 28 counties (2019-2025).</a:t>
             </a:r>
             <a:endParaRPr lang="en-US" sz="850" dirty="0"/>
           </a:p>
